--- a/docs/РадарВузов-презентация.pptx
+++ b/docs/РадарВузов-презентация.pptx
@@ -2004,7 +2004,7 @@
                 <a:ea typeface="Calibri" pitchFamily="34" charset="-122"/>
                 <a:cs typeface="Calibri" pitchFamily="34" charset="-120"/>
               </a:rPr>
-              <a:t>Работающий прототип: 100 методов API, 319 тестов, демо-стенд на 351 записи</a:t>
+              <a:t>Работающий прототип: 116 операций API, 332 теста, демо-стенд на 351 записи</a:t>
             </a:r>
             <a:endParaRPr lang="en-US" sz="1300" dirty="0"/>
           </a:p>
@@ -3816,7 +3816,7 @@
                 <a:ea typeface="Calibri" pitchFamily="34" charset="-122"/>
                 <a:cs typeface="Calibri" pitchFamily="34" charset="-120"/>
               </a:rPr>
-              <a:t>100 методов API и контракт, 319 тестов, 46 таблиц</a:t>
+              <a:t>116 операций на 102 путях API, контракт, 332 теста, 46 таблиц</a:t>
             </a:r>
             <a:endParaRPr lang="en-US" sz="1400" dirty="0"/>
           </a:p>

--- a/docs/РадарВузов-презентация.pptx
+++ b/docs/РадарВузов-презентация.pptx
@@ -2004,7 +2004,7 @@
                 <a:ea typeface="Calibri" pitchFamily="34" charset="-122"/>
                 <a:cs typeface="Calibri" pitchFamily="34" charset="-120"/>
               </a:rPr>
-              <a:t>Работающий прототип: 116 операций API, 332 теста, демо-стенд на 351 записи</a:t>
+              <a:t>Работающий прототип: 116 операций API, 379 тестов, демо-стенд на 351 записи</a:t>
             </a:r>
             <a:endParaRPr lang="en-US" sz="1300" dirty="0"/>
           </a:p>
@@ -3816,7 +3816,7 @@
                 <a:ea typeface="Calibri" pitchFamily="34" charset="-122"/>
                 <a:cs typeface="Calibri" pitchFamily="34" charset="-120"/>
               </a:rPr>
-              <a:t>116 операций на 102 путях API, контракт, 332 теста, 46 таблиц</a:t>
+              <a:t>116 операций на 102 путях API, контракт, 379 тестов, 46 таблиц</a:t>
             </a:r>
             <a:endParaRPr lang="en-US" sz="1400" dirty="0"/>
           </a:p>

--- a/docs/РадарВузов-презентация.pptx
+++ b/docs/РадарВузов-презентация.pptx
@@ -2004,7 +2004,7 @@
                 <a:ea typeface="Calibri" pitchFamily="34" charset="-122"/>
                 <a:cs typeface="Calibri" pitchFamily="34" charset="-120"/>
               </a:rPr>
-              <a:t>Работающий прототип: 116 операций API, 379 тестов, демо-стенд на 351 записи</a:t>
+              <a:t>Работающий прототип: 122 операции API, 389 тестов, демо-стенд на 351 записи</a:t>
             </a:r>
             <a:endParaRPr lang="en-US" sz="1300" dirty="0"/>
           </a:p>
@@ -3816,7 +3816,7 @@
                 <a:ea typeface="Calibri" pitchFamily="34" charset="-122"/>
                 <a:cs typeface="Calibri" pitchFamily="34" charset="-120"/>
               </a:rPr>
-              <a:t>116 операций на 102 путях API, контракт, 379 тестов, 46 таблиц</a:t>
+              <a:t>122 операции на 107 путях API, контракт, 389 тестов, 48 таблиц</a:t>
             </a:r>
             <a:endParaRPr lang="en-US" sz="1400" dirty="0"/>
           </a:p>

--- a/docs/РадарВузов-презентация.pptx
+++ b/docs/РадарВузов-презентация.pptx
@@ -8236,7 +8236,7 @@
                 <a:ea typeface="Calibri" pitchFamily="34" charset="-122"/>
                 <a:cs typeface="Calibri" pitchFamily="34" charset="-120"/>
               </a:rPr>
-              <a:t>Один сервер, docker compose, наружу только 80 и 443</a:t>
+              <a:t>Сервер в Yandex Cloud, docker compose, файлы в Object Storage; наружу только 80 и 443</a:t>
             </a:r>
             <a:endParaRPr lang="en-US" sz="1400" dirty="0"/>
           </a:p>
@@ -8794,7 +8794,7 @@
                 <a:ea typeface="Calibri" pitchFamily="34" charset="-122"/>
                 <a:cs typeface="Calibri" pitchFamily="34" charset="-120"/>
               </a:rPr>
-              <a:t>MinIO (S3)</a:t>
+              <a:t>S3: Object Storage / MinIO</a:t>
             </a:r>
             <a:endParaRPr lang="en-US" sz="1300" dirty="0"/>
           </a:p>
@@ -8867,7 +8867,7 @@
                 <a:ea typeface="Calibri" pitchFamily="34" charset="-122"/>
                 <a:cs typeface="Calibri" pitchFamily="34" charset="-120"/>
               </a:rPr>
-              <a:t>Резервные копии раз в сутки: дамп базы и зеркало файлов из MinIO — в один том, с проверкой восстановления</a:t>
+              <a:t>Копии раз в сутки: дамп базы с проверкой восстановления; файлы — в S3 с версионированием, копии шифруются во внешний бакет</a:t>
             </a:r>
             <a:endParaRPr lang="en-US" sz="1300" dirty="0"/>
           </a:p>
